--- a/splunk-es-soar-techtouch-demo/slides/M365乗っ取り対応デモ_事前説明.pptx
+++ b/splunk-es-soar-techtouch-demo/slides/M365乗っ取り対応デモ_事前説明.pptx
@@ -122,13 +122,13 @@
   <p:extLst>
     <p:ext uri="{521415D9-36F7-43E2-AB2F-B90AF26B5E84}">
       <p14:sectionLst xmlns:p14="http://schemas.microsoft.com/office/powerpoint/2010/main">
-        <p14:section name="はじめに" id="{3a334db5-b928-3d22-2361-5743a4d431fc}">
+        <p14:section name="はじめに" id="{a300d8bc-2326-820b-cc90-be7b9bbd2a6b}">
           <p14:sldIdLst>
             <p14:sldId id="256"/>
             <p14:sldId id="257"/>
           </p14:sldIdLst>
         </p14:section>
-        <p14:section name="シナリオ" id="{f1f66eff-0415-0d89-9a70-e6eec72e57f6}">
+        <p14:section name="シナリオ" id="{08c7106e-aec3-9b34-e666-dcf7f7b9d58b}">
           <p14:sldIdLst>
             <p14:sldId id="258"/>
             <p14:sldId id="259"/>
@@ -137,7 +137,7 @@
             <p14:sldId id="262"/>
           </p14:sldIdLst>
         </p14:section>
-        <p14:section name="デモ" id="{8433da72-e14d-c25c-056a-9a93b8a1b246}">
+        <p14:section name="デモ" id="{4515fb28-0fe3-d5fc-87cf-47fa583bb7ab}">
           <p14:sldIdLst>
             <p14:sldId id="263"/>
             <p14:sldId id="264"/>
@@ -146,7 +146,7 @@
             <p14:sldId id="267"/>
           </p14:sldIdLst>
         </p14:section>
-        <p14:section name="進め方" id="{957050df-cc6f-d291-94f0-bacf1731a997}">
+        <p14:section name="進め方" id="{d138030f-8eb5-0734-ea40-45e527c228a7}">
           <p14:sldIdLst>
             <p14:sldId id="268"/>
             <p14:sldId id="269"/>

--- a/splunk-es-soar-techtouch-demo/slides/M365乗っ取り対応デモ_事前説明.pptx
+++ b/splunk-es-soar-techtouch-demo/slides/M365乗っ取り対応デモ_事前説明.pptx
@@ -122,13 +122,13 @@
   <p:extLst>
     <p:ext uri="{521415D9-36F7-43E2-AB2F-B90AF26B5E84}">
       <p14:sectionLst xmlns:p14="http://schemas.microsoft.com/office/powerpoint/2010/main">
-        <p14:section name="はじめに" id="{a300d8bc-2326-820b-cc90-be7b9bbd2a6b}">
+        <p14:section name="はじめに" id="{d3f0a926-a924-d231-f4da-2122e0aa7706}">
           <p14:sldIdLst>
             <p14:sldId id="256"/>
             <p14:sldId id="257"/>
           </p14:sldIdLst>
         </p14:section>
-        <p14:section name="シナリオ" id="{08c7106e-aec3-9b34-e666-dcf7f7b9d58b}">
+        <p14:section name="シナリオ" id="{93fd3f41-d58e-ba89-92a0-cdfc505cf6d4}">
           <p14:sldIdLst>
             <p14:sldId id="258"/>
             <p14:sldId id="259"/>
@@ -137,7 +137,7 @@
             <p14:sldId id="262"/>
           </p14:sldIdLst>
         </p14:section>
-        <p14:section name="デモ" id="{4515fb28-0fe3-d5fc-87cf-47fa583bb7ab}">
+        <p14:section name="デモ" id="{52d3a786-1c06-7b42-a697-22e26f2ba918}">
           <p14:sldIdLst>
             <p14:sldId id="263"/>
             <p14:sldId id="264"/>
@@ -146,7 +146,7 @@
             <p14:sldId id="267"/>
           </p14:sldIdLst>
         </p14:section>
-        <p14:section name="進め方" id="{d138030f-8eb5-0734-ea40-45e527c228a7}">
+        <p14:section name="進め方" id="{033145bf-aaa8-f8c4-7998-88eefa407154}">
           <p14:sldIdLst>
             <p14:sldId id="268"/>
             <p14:sldId id="269"/>
@@ -2220,7 +2220,7 @@
       </p:sp>
       <p:sp>
         <p:nvSpPr>
-          <p:cNvPr id="25" name="Slide Number Placeholder 0"/>
+          <p:cNvPr id="5" name="Slide Number Placeholder 0"/>
           <p:cNvSpPr>
             <a:spLocks noGrp="1"/>
           </p:cNvSpPr>
@@ -2290,7 +2290,7 @@
       </p:grpSpPr>
       <p:sp>
         <p:nvSpPr>
-          <p:cNvPr id="25" name="Slide Number Placeholder 0"/>
+          <p:cNvPr id="2" name="Slide Number Placeholder 0"/>
           <p:cNvSpPr>
             <a:spLocks noGrp="1"/>
           </p:cNvSpPr>
@@ -3866,7 +3866,7 @@
       </p:sp>
       <p:sp>
         <p:nvSpPr>
-          <p:cNvPr id="25" name="Slide Number Placeholder 0"/>
+          <p:cNvPr id="31" name="Slide Number Placeholder 0"/>
           <p:cNvSpPr>
             <a:spLocks noGrp="1"/>
           </p:cNvSpPr>
@@ -4975,7 +4975,7 @@
       </p:sp>
       <p:sp>
         <p:nvSpPr>
-          <p:cNvPr id="25" name="Slide Number Placeholder 0"/>
+          <p:cNvPr id="33" name="Slide Number Placeholder 0"/>
           <p:cNvSpPr>
             <a:spLocks noGrp="1"/>
           </p:cNvSpPr>
@@ -5177,7 +5177,7 @@
       </p:sp>
       <p:graphicFrame>
         <p:nvGraphicFramePr>
-          <p:cNvPr id="13" name="ai-table"/>
+          <p:cNvPr id="6" name="ai-table"/>
           <p:cNvGraphicFramePr>
             <a:graphicFrameLocks noGrp="1"/>
           </p:cNvGraphicFramePr>
@@ -6620,7 +6620,7 @@
       </p:sp>
       <p:sp>
         <p:nvSpPr>
-          <p:cNvPr id="25" name="Slide Number Placeholder 0"/>
+          <p:cNvPr id="9" name="Slide Number Placeholder 0"/>
           <p:cNvSpPr>
             <a:spLocks noGrp="1"/>
           </p:cNvSpPr>
@@ -7557,7 +7557,7 @@
       </p:sp>
       <p:sp>
         <p:nvSpPr>
-          <p:cNvPr id="25" name="Slide Number Placeholder 0"/>
+          <p:cNvPr id="27" name="Slide Number Placeholder 0"/>
           <p:cNvSpPr>
             <a:spLocks noGrp="1"/>
           </p:cNvSpPr>
@@ -7759,7 +7759,7 @@
       </p:sp>
       <p:graphicFrame>
         <p:nvGraphicFramePr>
-          <p:cNvPr id="15" name="ask-table"/>
+          <p:cNvPr id="6" name="ask-table"/>
           <p:cNvGraphicFramePr>
             <a:graphicFrameLocks noGrp="1"/>
           </p:cNvGraphicFramePr>
@@ -9709,7 +9709,7 @@
       </p:sp>
       <p:sp>
         <p:nvSpPr>
-          <p:cNvPr id="25" name="Slide Number Placeholder 0"/>
+          <p:cNvPr id="8" name="Slide Number Placeholder 0"/>
           <p:cNvSpPr>
             <a:spLocks noGrp="1"/>
           </p:cNvSpPr>
@@ -9911,7 +9911,7 @@
       </p:sp>
       <p:graphicFrame>
         <p:nvGraphicFramePr>
-          <p:cNvPr id="16" name="pre-table"/>
+          <p:cNvPr id="6" name="pre-table"/>
           <p:cNvGraphicFramePr>
             <a:graphicFrameLocks noGrp="1"/>
           </p:cNvGraphicFramePr>
@@ -10616,7 +10616,7 @@
       </p:graphicFrame>
       <p:sp>
         <p:nvSpPr>
-          <p:cNvPr id="25" name="Slide Number Placeholder 0"/>
+          <p:cNvPr id="7" name="Slide Number Placeholder 0"/>
           <p:cNvSpPr>
             <a:spLocks noGrp="1"/>
           </p:cNvSpPr>
@@ -11293,7 +11293,7 @@
       </p:sp>
       <p:sp>
         <p:nvSpPr>
-          <p:cNvPr id="25" name="Slide Number Placeholder 0"/>
+          <p:cNvPr id="21" name="Slide Number Placeholder 0"/>
           <p:cNvSpPr>
             <a:spLocks noGrp="1"/>
           </p:cNvSpPr>
@@ -12644,7 +12644,7 @@
       </p:sp>
       <p:sp>
         <p:nvSpPr>
-          <p:cNvPr id="25" name="Slide Number Placeholder 0"/>
+          <p:cNvPr id="40" name="Slide Number Placeholder 0"/>
           <p:cNvSpPr>
             <a:spLocks noGrp="1"/>
           </p:cNvSpPr>
@@ -13910,7 +13910,7 @@
       </p:sp>
       <p:sp>
         <p:nvSpPr>
-          <p:cNvPr id="25" name="Slide Number Placeholder 0"/>
+          <p:cNvPr id="43" name="Slide Number Placeholder 0"/>
           <p:cNvSpPr>
             <a:spLocks noGrp="1"/>
           </p:cNvSpPr>
@@ -14112,7 +14112,7 @@
       </p:sp>
       <p:graphicFrame>
         <p:nvGraphicFramePr>
-          <p:cNvPr id="5" name="structure-table"/>
+          <p:cNvPr id="6" name="structure-table"/>
           <p:cNvGraphicFramePr>
             <a:graphicFrameLocks noGrp="1"/>
           </p:cNvGraphicFramePr>
@@ -15252,7 +15252,7 @@
       </p:sp>
       <p:sp>
         <p:nvSpPr>
-          <p:cNvPr id="25" name="Slide Number Placeholder 0"/>
+          <p:cNvPr id="8" name="Slide Number Placeholder 0"/>
           <p:cNvSpPr>
             <a:spLocks noGrp="1"/>
           </p:cNvSpPr>
@@ -16075,7 +16075,7 @@
       </p:sp>
       <p:sp>
         <p:nvSpPr>
-          <p:cNvPr id="25" name="Slide Number Placeholder 0"/>
+          <p:cNvPr id="27" name="Slide Number Placeholder 0"/>
           <p:cNvSpPr>
             <a:spLocks noGrp="1"/>
           </p:cNvSpPr>
@@ -17211,7 +17211,7 @@
       </p:sp>
       <p:sp>
         <p:nvSpPr>
-          <p:cNvPr id="25" name="Slide Number Placeholder 0"/>
+          <p:cNvPr id="36" name="Slide Number Placeholder 0"/>
           <p:cNvSpPr>
             <a:spLocks noGrp="1"/>
           </p:cNvSpPr>
@@ -17413,7 +17413,7 @@
       </p:sp>
       <p:graphicFrame>
         <p:nvGraphicFramePr>
-          <p:cNvPr id="8" name="ba-table"/>
+          <p:cNvPr id="6" name="ba-table"/>
           <p:cNvGraphicFramePr>
             <a:graphicFrameLocks noGrp="1"/>
           </p:cNvGraphicFramePr>
@@ -18701,7 +18701,7 @@
       </p:sp>
       <p:sp>
         <p:nvSpPr>
-          <p:cNvPr id="25" name="Slide Number Placeholder 0"/>
+          <p:cNvPr id="8" name="Slide Number Placeholder 0"/>
           <p:cNvSpPr>
             <a:spLocks noGrp="1"/>
           </p:cNvSpPr>
@@ -20316,7 +20316,7 @@
       </p:sp>
       <p:sp>
         <p:nvSpPr>
-          <p:cNvPr id="25" name="Slide Number Placeholder 0"/>
+          <p:cNvPr id="52" name="Slide Number Placeholder 0"/>
           <p:cNvSpPr>
             <a:spLocks noGrp="1"/>
           </p:cNvSpPr>
@@ -20952,7 +20952,7 @@
       </p:sp>
       <p:sp>
         <p:nvSpPr>
-          <p:cNvPr id="25" name="Slide Number Placeholder 0"/>
+          <p:cNvPr id="20" name="Slide Number Placeholder 0"/>
           <p:cNvSpPr>
             <a:spLocks noGrp="1"/>
           </p:cNvSpPr>
